--- a/cdp_project/Customer_360_CDP.pptx
+++ b/cdp_project/Customer_360_CDP.pptx
@@ -1450,14 +1450,6 @@
             <a:pPr marL="0" indent="0">
               <a:buNone/>
             </a:pPr>
-            <a:r>
-              <a:rPr lang="en-US" sz="900" b="1" kern="0" spc="300" dirty="0">
-                <a:solidFill>
-                  <a:srgbClr val="02C39A"/>
-                </a:solidFill>
-              </a:rPr>
-              <a:t>BUSINESS REQUIREMENTS DOCUMENT</a:t>
-            </a:r>
             <a:endParaRPr lang="en-US" sz="900" dirty="0"/>
           </a:p>
         </p:txBody>
@@ -1470,7 +1462,7 @@
         </p:nvSpPr>
         <p:spPr>
           <a:xfrm>
-            <a:off x="731520" y="1005840"/>
+            <a:off x="731520" y="337623"/>
             <a:ext cx="7772400" cy="1005840"/>
           </a:xfrm>
           <a:prstGeom prst="rect">
@@ -4777,29 +4769,7 @@
                 <a:ea typeface="Calibri" pitchFamily="34" charset="-122"/>
                 <a:cs typeface="Calibri" pitchFamily="34" charset="-120"/>
               </a:rPr>
-              <a:t>Python / </a:t>
-            </a:r>
-            <a:r>
-              <a:rPr lang="en-US" sz="850" dirty="0" err="1">
-                <a:solidFill>
-                  <a:srgbClr val="64748B"/>
-                </a:solidFill>
-                <a:latin typeface="Calibri" pitchFamily="34" charset="0"/>
-                <a:ea typeface="Calibri" pitchFamily="34" charset="-122"/>
-                <a:cs typeface="Calibri" pitchFamily="34" charset="-120"/>
-              </a:rPr>
-              <a:t>Medalian</a:t>
-            </a:r>
-            <a:r>
-              <a:rPr lang="en-US" sz="850" dirty="0">
-                <a:solidFill>
-                  <a:srgbClr val="64748B"/>
-                </a:solidFill>
-                <a:latin typeface="Calibri" pitchFamily="34" charset="0"/>
-                <a:ea typeface="Calibri" pitchFamily="34" charset="-122"/>
-                <a:cs typeface="Calibri" pitchFamily="34" charset="-120"/>
-              </a:rPr>
-              <a:t> layers</a:t>
+              <a:t>Python / Medallion layers</a:t>
             </a:r>
             <a:endParaRPr lang="en-US" sz="850" dirty="0"/>
           </a:p>
